--- a/EVision Analytics-ppt.pptx
+++ b/EVision Analytics-ppt.pptx
@@ -9,8 +9,8 @@
   </p:notesMasterIdLst>
   <p:sldIdLst>
     <p:sldId id="256" r:id="rId2"/>
-    <p:sldId id="257" r:id="rId3"/>
-    <p:sldId id="258" r:id="rId4"/>
+    <p:sldId id="258" r:id="rId3"/>
+    <p:sldId id="257" r:id="rId4"/>
     <p:sldId id="259" r:id="rId5"/>
     <p:sldId id="260" r:id="rId6"/>
     <p:sldId id="261" r:id="rId7"/>
@@ -276,7 +276,7 @@
   </p:defaultTextStyle>
   <p:extLst>
     <p:ext uri="GoogleSlidesCustomDataVersion2">
-      <go:slidesCustomData xmlns:go="http://customooxmlschemas.google.com/" xmlns:ahyp="http://schemas.microsoft.com/office/drawing/2018/hyperlinkcolor" xmlns:p15="http://schemas.microsoft.com/office/powerpoint/2012/main" xmlns:p14="http://schemas.microsoft.com/office/powerpoint/2010/main" xmlns:com="http://schemas.openxmlformats.org/drawingml/2006/compatibility" xmlns:pvml="urn:schemas-microsoft-com:office:powerpoint" xmlns:v="urn:schemas-microsoft-com:vml" xmlns:o="urn:schemas-microsoft-com:office:office" xmlns:dgm="http://schemas.openxmlformats.org/drawingml/2006/diagram" xmlns:c="http://schemas.openxmlformats.org/drawingml/2006/chart" xmlns:mv="urn:schemas-microsoft-com:mac:vml" xmlns:mc="http://schemas.openxmlformats.org/markup-compatibility/2006" xmlns="" r:id="rId29" roundtripDataSignature="AMtx7miEvxGCVx2sBawr6nnOMF+v6WZ6gg=="/>
+      <go:slidesCustomData xmlns="" xmlns:mc="http://schemas.openxmlformats.org/markup-compatibility/2006" xmlns:mv="urn:schemas-microsoft-com:mac:vml" xmlns:c="http://schemas.openxmlformats.org/drawingml/2006/chart" xmlns:dgm="http://schemas.openxmlformats.org/drawingml/2006/diagram" xmlns:o="urn:schemas-microsoft-com:office:office" xmlns:v="urn:schemas-microsoft-com:vml" xmlns:pvml="urn:schemas-microsoft-com:office:powerpoint" xmlns:com="http://schemas.openxmlformats.org/drawingml/2006/compatibility" xmlns:p14="http://schemas.microsoft.com/office/powerpoint/2010/main" xmlns:p15="http://schemas.microsoft.com/office/powerpoint/2012/main" xmlns:ahyp="http://schemas.microsoft.com/office/drawing/2018/hyperlinkcolor" xmlns:go="http://customooxmlschemas.google.com/" r:id="rId29" roundtripDataSignature="AMtx7miEvxGCVx2sBawr6nnOMF+v6WZ6gg=="/>
     </p:ext>
   </p:extLst>
 </p:presentation>
@@ -790,8 +790,8 @@
         </p:nvSpPr>
         <p:spPr>
           <a:xfrm>
-            <a:off x="1143225" y="685800"/>
-            <a:ext cx="4572225" cy="3429000"/>
+            <a:off x="381000" y="685800"/>
+            <a:ext cx="6096000" cy="3429000"/>
           </a:xfrm>
           <a:custGeom>
             <a:avLst/>
@@ -1102,8 +1102,8 @@
         </p:nvSpPr>
         <p:spPr>
           <a:xfrm>
-            <a:off x="1143225" y="685800"/>
-            <a:ext cx="4572300" cy="3429000"/>
+            <a:off x="381000" y="685800"/>
+            <a:ext cx="6096000" cy="3429000"/>
           </a:xfrm>
           <a:custGeom>
             <a:avLst/>
@@ -1518,8 +1518,8 @@
         </p:nvSpPr>
         <p:spPr>
           <a:xfrm>
-            <a:off x="1143225" y="685800"/>
-            <a:ext cx="4572225" cy="3429000"/>
+            <a:off x="381000" y="685800"/>
+            <a:ext cx="6096000" cy="3429000"/>
           </a:xfrm>
           <a:custGeom>
             <a:avLst/>
@@ -1768,7 +1768,7 @@
   <p:cSld>
     <p:spTree>
       <p:nvGrpSpPr>
-        <p:cNvPr id="1" name="Shape 89"/>
+        <p:cNvPr id="1" name="Shape 96"/>
         <p:cNvGrpSpPr/>
         <p:nvPr/>
       </p:nvGrpSpPr>
@@ -1782,7 +1782,7 @@
       </p:grpSpPr>
       <p:sp>
         <p:nvSpPr>
-          <p:cNvPr id="90" name="Google Shape;90;p3:notes"/>
+          <p:cNvPr id="97" name="Google Shape;97;p4:notes"/>
           <p:cNvSpPr txBox="1">
             <a:spLocks noGrp="1"/>
           </p:cNvSpPr>
@@ -1820,7 +1820,7 @@
       </p:sp>
       <p:sp>
         <p:nvSpPr>
-          <p:cNvPr id="91" name="Google Shape;91;p3:notes"/>
+          <p:cNvPr id="98" name="Google Shape;98;p4:notes"/>
           <p:cNvSpPr>
             <a:spLocks noGrp="1" noRot="1" noChangeAspect="1"/>
           </p:cNvSpPr>
@@ -1830,8 +1830,8 @@
         </p:nvSpPr>
         <p:spPr>
           <a:xfrm>
-            <a:off x="1143225" y="685800"/>
-            <a:ext cx="4572225" cy="3429000"/>
+            <a:off x="381000" y="685800"/>
+            <a:ext cx="6096000" cy="3429000"/>
           </a:xfrm>
           <a:custGeom>
             <a:avLst/>
@@ -1872,7 +1872,7 @@
   <p:cSld>
     <p:spTree>
       <p:nvGrpSpPr>
-        <p:cNvPr id="1" name="Shape 96"/>
+        <p:cNvPr id="1" name="Shape 89"/>
         <p:cNvGrpSpPr/>
         <p:nvPr/>
       </p:nvGrpSpPr>
@@ -1886,7 +1886,7 @@
       </p:grpSpPr>
       <p:sp>
         <p:nvSpPr>
-          <p:cNvPr id="97" name="Google Shape;97;p4:notes"/>
+          <p:cNvPr id="90" name="Google Shape;90;p3:notes"/>
           <p:cNvSpPr txBox="1">
             <a:spLocks noGrp="1"/>
           </p:cNvSpPr>
@@ -1924,7 +1924,7 @@
       </p:sp>
       <p:sp>
         <p:nvSpPr>
-          <p:cNvPr id="98" name="Google Shape;98;p4:notes"/>
+          <p:cNvPr id="91" name="Google Shape;91;p3:notes"/>
           <p:cNvSpPr>
             <a:spLocks noGrp="1" noRot="1" noChangeAspect="1"/>
           </p:cNvSpPr>
@@ -2038,8 +2038,8 @@
         </p:nvSpPr>
         <p:spPr>
           <a:xfrm>
-            <a:off x="1143225" y="685800"/>
-            <a:ext cx="4572225" cy="3429000"/>
+            <a:off x="381000" y="685800"/>
+            <a:ext cx="6096000" cy="3429000"/>
           </a:xfrm>
           <a:custGeom>
             <a:avLst/>
@@ -13059,7 +13059,7 @@
         </p:blipFill>
         <p:spPr>
           <a:xfrm>
-            <a:off x="0" y="-476250"/>
+            <a:off x="0" y="-285776"/>
             <a:ext cx="12192000" cy="7334250"/>
           </a:xfrm>
           <a:prstGeom prst="rect">
@@ -13079,8 +13079,8 @@
         </p:nvSpPr>
         <p:spPr>
           <a:xfrm flipH="1">
-            <a:off x="4121200" y="3714750"/>
-            <a:ext cx="4117800" cy="708000"/>
+            <a:off x="4524364" y="3643314"/>
+            <a:ext cx="4117800" cy="707846"/>
           </a:xfrm>
           <a:prstGeom prst="rect">
             <a:avLst/>
@@ -13106,7 +13106,7 @@
               <a:buNone/>
             </a:pPr>
             <a:r>
-              <a:rPr lang="en-US" sz="4000" b="1">
+              <a:rPr lang="en-US" sz="4000" b="1" dirty="0" smtClean="0">
                 <a:solidFill>
                   <a:schemeClr val="dk1"/>
                 </a:solidFill>
@@ -13115,7 +13115,7 @@
                 <a:cs typeface="Calibri"/>
                 <a:sym typeface="Calibri"/>
               </a:rPr>
-              <a:t>E-Vision Analytics</a:t>
+              <a:t>Global EV Sales</a:t>
             </a:r>
             <a:endParaRPr/>
           </a:p>
@@ -14231,7 +14231,7 @@
         </p:nvSpPr>
         <p:spPr>
           <a:xfrm>
-            <a:off x="1030941" y="1028343"/>
+            <a:off x="809588" y="857232"/>
             <a:ext cx="10345200" cy="369300"/>
           </a:xfrm>
           <a:prstGeom prst="rect">
@@ -14509,30 +14509,35 @@
       </p:sp>
       <p:pic>
         <p:nvPicPr>
-          <p:cNvPr id="192" name="Google Shape;192;g3e0b2cc6d2f_0_55"/>
-          <p:cNvPicPr preferRelativeResize="0"/>
+          <p:cNvPr id="1027" name="Picture 3"/>
+          <p:cNvPicPr>
+            <a:picLocks noChangeAspect="1" noChangeArrowheads="1"/>
+          </p:cNvPicPr>
           <p:nvPr/>
         </p:nvPicPr>
         <p:blipFill>
-          <a:blip r:embed="rId4">
-            <a:alphaModFix/>
-          </a:blip>
+          <a:blip r:embed="rId4"/>
+          <a:srcRect/>
           <a:stretch>
             <a:fillRect/>
           </a:stretch>
         </p:blipFill>
-        <p:spPr>
+        <p:spPr bwMode="auto">
           <a:xfrm>
-            <a:off x="4196075" y="1105425"/>
-            <a:ext cx="7843524" cy="4714075"/>
+            <a:off x="4167174" y="1476044"/>
+            <a:ext cx="7237854" cy="4010326"/>
           </a:xfrm>
           <a:prstGeom prst="rect">
             <a:avLst/>
           </a:prstGeom>
           <a:noFill/>
-          <a:ln>
+          <a:ln w="9525">
             <a:noFill/>
+            <a:miter lim="800000"/>
+            <a:headEnd/>
+            <a:tailEnd/>
           </a:ln>
+          <a:effectLst/>
         </p:spPr>
       </p:pic>
     </p:spTree>
@@ -15767,7 +15772,7 @@
         <p:spPr>
           <a:xfrm>
             <a:off x="1601400" y="1357350"/>
-            <a:ext cx="8265900" cy="4725300"/>
+            <a:ext cx="8265900" cy="5016718"/>
           </a:xfrm>
           <a:prstGeom prst="rect">
             <a:avLst/>
@@ -15783,25 +15788,20 @@
           </a:bodyPr>
           <a:lstStyle/>
           <a:p>
-            <a:pPr marL="0" lvl="0" indent="0" algn="l" rtl="0">
+            <a:pPr>
               <a:lnSpc>
                 <a:spcPct val="150000"/>
               </a:lnSpc>
               <a:spcBef>
                 <a:spcPts val="1200"/>
               </a:spcBef>
-              <a:spcAft>
-                <a:spcPts val="0"/>
-              </a:spcAft>
               <a:buClr>
                 <a:schemeClr val="dk1"/>
               </a:buClr>
               <a:buSzPts val="1100"/>
-              <a:buFont typeface="Arial"/>
-              <a:buNone/>
             </a:pPr>
             <a:r>
-              <a:rPr lang="en-US" sz="1800">
+              <a:rPr lang="en-US" sz="1800" dirty="0">
                 <a:solidFill>
                   <a:schemeClr val="dk1"/>
                 </a:solidFill>
@@ -15809,20 +15809,52 @@
               <a:t>The</a:t>
             </a:r>
             <a:r>
-              <a:rPr lang="en-US" sz="1800" b="1">
+              <a:rPr lang="en-US" sz="1800" b="1" dirty="0">
                 <a:solidFill>
                   <a:schemeClr val="dk1"/>
                 </a:solidFill>
               </a:rPr>
-              <a:t> EVision Analytics</a:t>
+              <a:t> </a:t>
             </a:r>
             <a:r>
-              <a:rPr lang="en-US" sz="1800">
+              <a:rPr lang="en-US" sz="1800" b="1" dirty="0" smtClean="0">
+                <a:solidFill>
+                  <a:schemeClr val="dk1"/>
+                </a:solidFill>
+                <a:latin typeface="Calibri"/>
+                <a:ea typeface="Calibri"/>
+                <a:cs typeface="Calibri"/>
+                <a:sym typeface="Calibri"/>
+              </a:rPr>
+              <a:t>Global EV </a:t>
+            </a:r>
+            <a:r>
+              <a:rPr lang="en-US" sz="1800" b="1" dirty="0" smtClean="0">
+                <a:solidFill>
+                  <a:schemeClr val="dk1"/>
+                </a:solidFill>
+                <a:latin typeface="Calibri"/>
+                <a:ea typeface="Calibri"/>
+                <a:cs typeface="Calibri"/>
+                <a:sym typeface="Calibri"/>
+              </a:rPr>
+              <a:t>Sales </a:t>
+            </a:r>
+            <a:r>
+              <a:rPr lang="en-US" sz="1800" dirty="0" smtClean="0">
                 <a:solidFill>
                   <a:schemeClr val="dk1"/>
                 </a:solidFill>
               </a:rPr>
-              <a:t> dashboard successfully transformed raw EV data into meaningful business insights using Power BI.</a:t>
+              <a:t>dashboard </a:t>
+            </a:r>
+            <a:r>
+              <a:rPr lang="en-US" sz="1800" dirty="0">
+                <a:solidFill>
+                  <a:schemeClr val="dk1"/>
+                </a:solidFill>
+              </a:rPr>
+              <a:t>successfully transformed raw EV data into meaningful business insights using Power BI.</a:t>
             </a:r>
             <a:endParaRPr sz="1800">
               <a:solidFill>
@@ -15849,7 +15881,7 @@
               <a:buNone/>
             </a:pPr>
             <a:r>
-              <a:rPr lang="en-US" sz="1800">
+              <a:rPr lang="en-US" sz="1800" dirty="0">
                 <a:solidFill>
                   <a:schemeClr val="dk1"/>
                 </a:solidFill>
@@ -15880,7 +15912,7 @@
               <a:buChar char="●"/>
             </a:pPr>
             <a:r>
-              <a:rPr lang="en-US" sz="1800">
+              <a:rPr lang="en-US" sz="1800" dirty="0">
                 <a:solidFill>
                   <a:schemeClr val="dk1"/>
                 </a:solidFill>
@@ -15911,12 +15943,28 @@
               <a:buChar char="●"/>
             </a:pPr>
             <a:r>
-              <a:rPr lang="en-US" sz="1800">
+              <a:rPr lang="en-US" sz="1800" dirty="0">
                 <a:solidFill>
                   <a:schemeClr val="dk1"/>
                 </a:solidFill>
               </a:rPr>
-              <a:t>Regional and powertrain comparisons</a:t>
+              <a:t>Regional and </a:t>
+            </a:r>
+            <a:r>
+              <a:rPr lang="en-US" sz="1800" dirty="0" err="1">
+                <a:solidFill>
+                  <a:schemeClr val="dk1"/>
+                </a:solidFill>
+              </a:rPr>
+              <a:t>powertrain</a:t>
+            </a:r>
+            <a:r>
+              <a:rPr lang="en-US" sz="1800" dirty="0">
+                <a:solidFill>
+                  <a:schemeClr val="dk1"/>
+                </a:solidFill>
+              </a:rPr>
+              <a:t> comparisons</a:t>
             </a:r>
             <a:endParaRPr sz="1800">
               <a:solidFill>
@@ -15942,7 +15990,7 @@
               <a:buChar char="●"/>
             </a:pPr>
             <a:r>
-              <a:rPr lang="en-US" sz="1800">
+              <a:rPr lang="en-US" sz="1800" dirty="0">
                 <a:solidFill>
                   <a:schemeClr val="dk1"/>
                 </a:solidFill>
@@ -15973,7 +16021,7 @@
               <a:buChar char="●"/>
             </a:pPr>
             <a:r>
-              <a:rPr lang="en-US" sz="1800">
+              <a:rPr lang="en-US" sz="1800" dirty="0">
                 <a:solidFill>
                   <a:schemeClr val="dk1"/>
                 </a:solidFill>
@@ -16005,7 +16053,7 @@
               <a:buNone/>
             </a:pPr>
             <a:r>
-              <a:rPr lang="en-US" sz="1800">
+              <a:rPr lang="en-US" sz="1800" dirty="0">
                 <a:solidFill>
                   <a:schemeClr val="dk1"/>
                 </a:solidFill>
@@ -16272,6 +16320,470 @@
   <p:cSld>
     <p:spTree>
       <p:nvGrpSpPr>
+        <p:cNvPr id="1" name="Shape 99"/>
+        <p:cNvGrpSpPr/>
+        <p:nvPr/>
+      </p:nvGrpSpPr>
+      <p:grpSpPr>
+        <a:xfrm>
+          <a:off x="0" y="0"/>
+          <a:ext cx="0" cy="0"/>
+          <a:chOff x="0" y="0"/>
+          <a:chExt cx="0" cy="0"/>
+        </a:xfrm>
+      </p:grpSpPr>
+      <p:pic>
+        <p:nvPicPr>
+          <p:cNvPr id="100" name="Google Shape;100;p4"/>
+          <p:cNvPicPr preferRelativeResize="0"/>
+          <p:nvPr/>
+        </p:nvPicPr>
+        <p:blipFill rotWithShape="1">
+          <a:blip r:embed="rId3">
+            <a:alphaModFix/>
+          </a:blip>
+          <a:srcRect/>
+          <a:stretch/>
+        </p:blipFill>
+        <p:spPr>
+          <a:xfrm>
+            <a:off x="9257265" y="6255780"/>
+            <a:ext cx="2934735" cy="512574"/>
+          </a:xfrm>
+          <a:prstGeom prst="rect">
+            <a:avLst/>
+          </a:prstGeom>
+          <a:noFill/>
+          <a:ln>
+            <a:noFill/>
+          </a:ln>
+        </p:spPr>
+      </p:pic>
+      <p:sp>
+        <p:nvSpPr>
+          <p:cNvPr id="101" name="Google Shape;101;p4"/>
+          <p:cNvSpPr/>
+          <p:nvPr/>
+        </p:nvSpPr>
+        <p:spPr>
+          <a:xfrm>
+            <a:off x="888543" y="662498"/>
+            <a:ext cx="1858201" cy="646331"/>
+          </a:xfrm>
+          <a:prstGeom prst="rect">
+            <a:avLst/>
+          </a:prstGeom>
+          <a:noFill/>
+          <a:ln>
+            <a:noFill/>
+          </a:ln>
+        </p:spPr>
+        <p:txBody>
+          <a:bodyPr spcFirstLastPara="1" wrap="square" lIns="91425" tIns="45700" rIns="91425" bIns="45700" anchor="t" anchorCtr="0">
+            <a:spAutoFit/>
+          </a:bodyPr>
+          <a:lstStyle/>
+          <a:p>
+            <a:pPr marL="0" marR="0" lvl="0" indent="0" algn="l" rtl="0">
+              <a:spcBef>
+                <a:spcPts val="0"/>
+              </a:spcBef>
+              <a:spcAft>
+                <a:spcPts val="0"/>
+              </a:spcAft>
+              <a:buNone/>
+            </a:pPr>
+            <a:r>
+              <a:rPr lang="en-US" sz="3600" b="1">
+                <a:solidFill>
+                  <a:srgbClr val="FF0000"/>
+                </a:solidFill>
+                <a:latin typeface="Lato"/>
+                <a:ea typeface="Lato"/>
+                <a:cs typeface="Lato"/>
+                <a:sym typeface="Lato"/>
+              </a:rPr>
+              <a:t>Agenda</a:t>
+            </a:r>
+            <a:endParaRPr sz="1800" b="1">
+              <a:solidFill>
+                <a:srgbClr val="FF0000"/>
+              </a:solidFill>
+              <a:latin typeface="Calibri"/>
+              <a:ea typeface="Calibri"/>
+              <a:cs typeface="Calibri"/>
+              <a:sym typeface="Calibri"/>
+            </a:endParaRPr>
+          </a:p>
+        </p:txBody>
+      </p:sp>
+      <p:sp>
+        <p:nvSpPr>
+          <p:cNvPr id="102" name="Google Shape;102;p4"/>
+          <p:cNvSpPr/>
+          <p:nvPr/>
+        </p:nvSpPr>
+        <p:spPr>
+          <a:xfrm>
+            <a:off x="1585819" y="1859339"/>
+            <a:ext cx="6096000" cy="3693278"/>
+          </a:xfrm>
+          <a:prstGeom prst="rect">
+            <a:avLst/>
+          </a:prstGeom>
+          <a:noFill/>
+          <a:ln>
+            <a:noFill/>
+          </a:ln>
+        </p:spPr>
+        <p:txBody>
+          <a:bodyPr spcFirstLastPara="1" wrap="square" lIns="91425" tIns="45700" rIns="91425" bIns="45700" anchor="t" anchorCtr="0">
+            <a:spAutoFit/>
+          </a:bodyPr>
+          <a:lstStyle/>
+          <a:p>
+            <a:pPr marL="285750" lvl="0" indent="-285750">
+              <a:buClr>
+                <a:schemeClr val="dk1"/>
+              </a:buClr>
+              <a:buSzPts val="1800"/>
+              <a:buFont typeface="Arial"/>
+              <a:buChar char="•"/>
+            </a:pPr>
+            <a:r>
+              <a:rPr lang="en-US" sz="1800" dirty="0" smtClean="0">
+                <a:solidFill>
+                  <a:schemeClr val="dk1"/>
+                </a:solidFill>
+              </a:rPr>
+              <a:t>Business Problem</a:t>
+            </a:r>
+            <a:endParaRPr lang="en-US" sz="1800" dirty="0" smtClean="0"/>
+          </a:p>
+          <a:p>
+            <a:pPr marL="285750" marR="0" lvl="0" indent="-285750" algn="l" rtl="0">
+              <a:spcBef>
+                <a:spcPts val="0"/>
+              </a:spcBef>
+              <a:spcAft>
+                <a:spcPts val="0"/>
+              </a:spcAft>
+              <a:buClr>
+                <a:schemeClr val="dk1"/>
+              </a:buClr>
+              <a:buSzPts val="1800"/>
+              <a:buFont typeface="Arial"/>
+              <a:buChar char="•"/>
+            </a:pPr>
+            <a:endParaRPr lang="en-US" sz="1800" dirty="0" smtClean="0">
+              <a:solidFill>
+                <a:schemeClr val="dk1"/>
+              </a:solidFill>
+            </a:endParaRPr>
+          </a:p>
+          <a:p>
+            <a:pPr marL="285750" indent="-285750">
+              <a:buClr>
+                <a:schemeClr val="dk1"/>
+              </a:buClr>
+              <a:buSzPts val="1800"/>
+              <a:buFont typeface="Arial"/>
+              <a:buChar char="•"/>
+            </a:pPr>
+            <a:r>
+              <a:rPr lang="en-US" sz="1800" dirty="0" smtClean="0">
+                <a:solidFill>
+                  <a:schemeClr val="dk1"/>
+                </a:solidFill>
+                <a:latin typeface="Arial"/>
+                <a:ea typeface="Arial"/>
+                <a:cs typeface="Arial"/>
+                <a:sym typeface="Arial"/>
+              </a:rPr>
+              <a:t>Project Objective</a:t>
+            </a:r>
+          </a:p>
+          <a:p>
+            <a:pPr marL="285750" marR="0" lvl="0" indent="-285750" algn="l" rtl="0">
+              <a:spcBef>
+                <a:spcPts val="0"/>
+              </a:spcBef>
+              <a:spcAft>
+                <a:spcPts val="0"/>
+              </a:spcAft>
+              <a:buClr>
+                <a:schemeClr val="dk1"/>
+              </a:buClr>
+              <a:buSzPts val="1800"/>
+            </a:pPr>
+            <a:endParaRPr sz="1800">
+              <a:solidFill>
+                <a:schemeClr val="dk1"/>
+              </a:solidFill>
+              <a:latin typeface="Arial"/>
+              <a:ea typeface="Arial"/>
+              <a:cs typeface="Arial"/>
+              <a:sym typeface="Arial"/>
+            </a:endParaRPr>
+          </a:p>
+          <a:p>
+            <a:pPr marL="285750" marR="0" lvl="0" indent="-285750" algn="l" rtl="0">
+              <a:spcBef>
+                <a:spcPts val="0"/>
+              </a:spcBef>
+              <a:spcAft>
+                <a:spcPts val="0"/>
+              </a:spcAft>
+              <a:buClr>
+                <a:schemeClr val="dk1"/>
+              </a:buClr>
+              <a:buSzPts val="1800"/>
+              <a:buFont typeface="Arial"/>
+              <a:buChar char="•"/>
+            </a:pPr>
+            <a:r>
+              <a:rPr lang="en-US" sz="1800" dirty="0">
+                <a:solidFill>
+                  <a:schemeClr val="dk1"/>
+                </a:solidFill>
+                <a:latin typeface="Arial"/>
+                <a:ea typeface="Arial"/>
+                <a:cs typeface="Arial"/>
+                <a:sym typeface="Arial"/>
+              </a:rPr>
+              <a:t>Project Flow</a:t>
+            </a:r>
+            <a:endParaRPr sz="1800">
+              <a:solidFill>
+                <a:schemeClr val="dk1"/>
+              </a:solidFill>
+              <a:latin typeface="Arial"/>
+              <a:ea typeface="Arial"/>
+              <a:cs typeface="Arial"/>
+              <a:sym typeface="Arial"/>
+            </a:endParaRPr>
+          </a:p>
+          <a:p>
+            <a:pPr marL="457200" marR="0" lvl="0" indent="0" algn="l" rtl="0">
+              <a:spcBef>
+                <a:spcPts val="0"/>
+              </a:spcBef>
+              <a:spcAft>
+                <a:spcPts val="0"/>
+              </a:spcAft>
+              <a:buNone/>
+            </a:pPr>
+            <a:endParaRPr sz="1800">
+              <a:solidFill>
+                <a:schemeClr val="dk1"/>
+              </a:solidFill>
+            </a:endParaRPr>
+          </a:p>
+          <a:p>
+            <a:pPr marL="285750" marR="0" lvl="0" indent="-285750" algn="l" rtl="0">
+              <a:spcBef>
+                <a:spcPts val="0"/>
+              </a:spcBef>
+              <a:spcAft>
+                <a:spcPts val="0"/>
+              </a:spcAft>
+              <a:buClr>
+                <a:schemeClr val="dk1"/>
+              </a:buClr>
+              <a:buSzPts val="1800"/>
+              <a:buChar char="•"/>
+            </a:pPr>
+            <a:r>
+              <a:rPr lang="en-US" sz="1800" dirty="0">
+                <a:solidFill>
+                  <a:schemeClr val="dk1"/>
+                </a:solidFill>
+              </a:rPr>
+              <a:t>Dataset Overview</a:t>
+            </a:r>
+            <a:endParaRPr sz="1800">
+              <a:solidFill>
+                <a:schemeClr val="dk1"/>
+              </a:solidFill>
+            </a:endParaRPr>
+          </a:p>
+          <a:p>
+            <a:pPr marL="285750" marR="0" lvl="0" indent="-171450" algn="l" rtl="0">
+              <a:spcBef>
+                <a:spcPts val="0"/>
+              </a:spcBef>
+              <a:spcAft>
+                <a:spcPts val="0"/>
+              </a:spcAft>
+              <a:buClr>
+                <a:schemeClr val="dk1"/>
+              </a:buClr>
+              <a:buSzPts val="1800"/>
+              <a:buFont typeface="Arial"/>
+              <a:buNone/>
+            </a:pPr>
+            <a:endParaRPr sz="1800">
+              <a:solidFill>
+                <a:schemeClr val="dk1"/>
+              </a:solidFill>
+              <a:latin typeface="Arial"/>
+              <a:ea typeface="Arial"/>
+              <a:cs typeface="Arial"/>
+              <a:sym typeface="Arial"/>
+            </a:endParaRPr>
+          </a:p>
+          <a:p>
+            <a:pPr marL="285750" marR="0" lvl="0" indent="-285750" algn="l" rtl="0">
+              <a:spcBef>
+                <a:spcPts val="0"/>
+              </a:spcBef>
+              <a:spcAft>
+                <a:spcPts val="0"/>
+              </a:spcAft>
+              <a:buClr>
+                <a:schemeClr val="dk1"/>
+              </a:buClr>
+              <a:buSzPts val="1800"/>
+              <a:buFont typeface="Arial"/>
+              <a:buChar char="•"/>
+            </a:pPr>
+            <a:r>
+              <a:rPr lang="en-US" sz="1800" dirty="0">
+                <a:solidFill>
+                  <a:schemeClr val="dk1"/>
+                </a:solidFill>
+                <a:latin typeface="Arial"/>
+                <a:ea typeface="Arial"/>
+                <a:cs typeface="Arial"/>
+                <a:sym typeface="Arial"/>
+              </a:rPr>
+              <a:t>Project steps and screenshots</a:t>
+            </a:r>
+            <a:endParaRPr/>
+          </a:p>
+          <a:p>
+            <a:pPr marL="285750" marR="0" lvl="0" indent="-171450" algn="l" rtl="0">
+              <a:spcBef>
+                <a:spcPts val="0"/>
+              </a:spcBef>
+              <a:spcAft>
+                <a:spcPts val="0"/>
+              </a:spcAft>
+              <a:buClr>
+                <a:schemeClr val="dk1"/>
+              </a:buClr>
+              <a:buSzPts val="1800"/>
+              <a:buFont typeface="Arial"/>
+              <a:buNone/>
+            </a:pPr>
+            <a:endParaRPr sz="1800">
+              <a:solidFill>
+                <a:schemeClr val="dk1"/>
+              </a:solidFill>
+              <a:latin typeface="Arial"/>
+              <a:ea typeface="Arial"/>
+              <a:cs typeface="Arial"/>
+              <a:sym typeface="Arial"/>
+            </a:endParaRPr>
+          </a:p>
+          <a:p>
+            <a:pPr marL="285750" marR="0" lvl="0" indent="-285750" algn="l" rtl="0">
+              <a:spcBef>
+                <a:spcPts val="0"/>
+              </a:spcBef>
+              <a:spcAft>
+                <a:spcPts val="0"/>
+              </a:spcAft>
+              <a:buClr>
+                <a:schemeClr val="dk1"/>
+              </a:buClr>
+              <a:buSzPts val="1800"/>
+              <a:buFont typeface="Arial"/>
+              <a:buChar char="•"/>
+            </a:pPr>
+            <a:r>
+              <a:rPr lang="en-US" sz="1800" dirty="0">
+                <a:solidFill>
+                  <a:schemeClr val="dk1"/>
+                </a:solidFill>
+                <a:latin typeface="Arial"/>
+                <a:ea typeface="Arial"/>
+                <a:cs typeface="Arial"/>
+                <a:sym typeface="Arial"/>
+              </a:rPr>
+              <a:t>Business Insights and Recommendations</a:t>
+            </a:r>
+            <a:endParaRPr/>
+          </a:p>
+          <a:p>
+            <a:pPr marL="285750" marR="0" lvl="0" indent="-171450" algn="l" rtl="0">
+              <a:spcBef>
+                <a:spcPts val="0"/>
+              </a:spcBef>
+              <a:spcAft>
+                <a:spcPts val="0"/>
+              </a:spcAft>
+              <a:buClr>
+                <a:schemeClr val="dk1"/>
+              </a:buClr>
+              <a:buSzPts val="1800"/>
+              <a:buFont typeface="Arial"/>
+              <a:buNone/>
+            </a:pPr>
+            <a:endParaRPr sz="1800">
+              <a:solidFill>
+                <a:schemeClr val="dk1"/>
+              </a:solidFill>
+              <a:latin typeface="Arial"/>
+              <a:ea typeface="Arial"/>
+              <a:cs typeface="Arial"/>
+              <a:sym typeface="Arial"/>
+            </a:endParaRPr>
+          </a:p>
+          <a:p>
+            <a:pPr marL="285750" marR="0" lvl="0" indent="-285750" algn="l" rtl="0">
+              <a:spcBef>
+                <a:spcPts val="0"/>
+              </a:spcBef>
+              <a:spcAft>
+                <a:spcPts val="0"/>
+              </a:spcAft>
+              <a:buClr>
+                <a:schemeClr val="dk1"/>
+              </a:buClr>
+              <a:buSzPts val="1800"/>
+              <a:buFont typeface="Arial"/>
+              <a:buChar char="•"/>
+            </a:pPr>
+            <a:r>
+              <a:rPr lang="en-US" sz="1800" dirty="0">
+                <a:solidFill>
+                  <a:schemeClr val="dk1"/>
+                </a:solidFill>
+                <a:latin typeface="Arial"/>
+                <a:ea typeface="Arial"/>
+                <a:cs typeface="Arial"/>
+                <a:sym typeface="Arial"/>
+              </a:rPr>
+              <a:t>Conclusion</a:t>
+            </a:r>
+            <a:endParaRPr/>
+          </a:p>
+        </p:txBody>
+      </p:sp>
+    </p:spTree>
+  </p:cSld>
+  <p:clrMapOvr>
+    <a:masterClrMapping/>
+  </p:clrMapOvr>
+</p:sld>
+</file>
+
+<file path=ppt/slides/slide3.xml><?xml version="1.0" encoding="utf-8"?>
+<p:sld xmlns:a="http://schemas.openxmlformats.org/drawingml/2006/main" xmlns:r="http://schemas.openxmlformats.org/officeDocument/2006/relationships" xmlns:p="http://schemas.openxmlformats.org/presentationml/2006/main">
+  <p:cSld>
+    <p:spTree>
+      <p:nvGrpSpPr>
         <p:cNvPr id="1" name="Shape 92"/>
         <p:cNvGrpSpPr/>
         <p:nvPr/>
@@ -16662,439 +17174,6 @@
                 <a:schemeClr val="dk1"/>
               </a:solidFill>
             </a:endParaRPr>
-          </a:p>
-        </p:txBody>
-      </p:sp>
-    </p:spTree>
-  </p:cSld>
-  <p:clrMapOvr>
-    <a:masterClrMapping/>
-  </p:clrMapOvr>
-</p:sld>
-</file>
-
-<file path=ppt/slides/slide3.xml><?xml version="1.0" encoding="utf-8"?>
-<p:sld xmlns:a="http://schemas.openxmlformats.org/drawingml/2006/main" xmlns:r="http://schemas.openxmlformats.org/officeDocument/2006/relationships" xmlns:p="http://schemas.openxmlformats.org/presentationml/2006/main">
-  <p:cSld>
-    <p:spTree>
-      <p:nvGrpSpPr>
-        <p:cNvPr id="1" name="Shape 99"/>
-        <p:cNvGrpSpPr/>
-        <p:nvPr/>
-      </p:nvGrpSpPr>
-      <p:grpSpPr>
-        <a:xfrm>
-          <a:off x="0" y="0"/>
-          <a:ext cx="0" cy="0"/>
-          <a:chOff x="0" y="0"/>
-          <a:chExt cx="0" cy="0"/>
-        </a:xfrm>
-      </p:grpSpPr>
-      <p:pic>
-        <p:nvPicPr>
-          <p:cNvPr id="100" name="Google Shape;100;p4"/>
-          <p:cNvPicPr preferRelativeResize="0"/>
-          <p:nvPr/>
-        </p:nvPicPr>
-        <p:blipFill rotWithShape="1">
-          <a:blip r:embed="rId3">
-            <a:alphaModFix/>
-          </a:blip>
-          <a:srcRect/>
-          <a:stretch/>
-        </p:blipFill>
-        <p:spPr>
-          <a:xfrm>
-            <a:off x="9257265" y="6255780"/>
-            <a:ext cx="2934735" cy="512574"/>
-          </a:xfrm>
-          <a:prstGeom prst="rect">
-            <a:avLst/>
-          </a:prstGeom>
-          <a:noFill/>
-          <a:ln>
-            <a:noFill/>
-          </a:ln>
-        </p:spPr>
-      </p:pic>
-      <p:sp>
-        <p:nvSpPr>
-          <p:cNvPr id="101" name="Google Shape;101;p4"/>
-          <p:cNvSpPr/>
-          <p:nvPr/>
-        </p:nvSpPr>
-        <p:spPr>
-          <a:xfrm>
-            <a:off x="888543" y="662498"/>
-            <a:ext cx="1858201" cy="646331"/>
-          </a:xfrm>
-          <a:prstGeom prst="rect">
-            <a:avLst/>
-          </a:prstGeom>
-          <a:noFill/>
-          <a:ln>
-            <a:noFill/>
-          </a:ln>
-        </p:spPr>
-        <p:txBody>
-          <a:bodyPr spcFirstLastPara="1" wrap="square" lIns="91425" tIns="45700" rIns="91425" bIns="45700" anchor="t" anchorCtr="0">
-            <a:spAutoFit/>
-          </a:bodyPr>
-          <a:lstStyle/>
-          <a:p>
-            <a:pPr marL="0" marR="0" lvl="0" indent="0" algn="l" rtl="0">
-              <a:spcBef>
-                <a:spcPts val="0"/>
-              </a:spcBef>
-              <a:spcAft>
-                <a:spcPts val="0"/>
-              </a:spcAft>
-              <a:buNone/>
-            </a:pPr>
-            <a:r>
-              <a:rPr lang="en-US" sz="3600" b="1">
-                <a:solidFill>
-                  <a:srgbClr val="FF0000"/>
-                </a:solidFill>
-                <a:latin typeface="Lato"/>
-                <a:ea typeface="Lato"/>
-                <a:cs typeface="Lato"/>
-                <a:sym typeface="Lato"/>
-              </a:rPr>
-              <a:t>Agenda</a:t>
-            </a:r>
-            <a:endParaRPr sz="1800" b="1">
-              <a:solidFill>
-                <a:srgbClr val="FF0000"/>
-              </a:solidFill>
-              <a:latin typeface="Calibri"/>
-              <a:ea typeface="Calibri"/>
-              <a:cs typeface="Calibri"/>
-              <a:sym typeface="Calibri"/>
-            </a:endParaRPr>
-          </a:p>
-        </p:txBody>
-      </p:sp>
-      <p:sp>
-        <p:nvSpPr>
-          <p:cNvPr id="102" name="Google Shape;102;p4"/>
-          <p:cNvSpPr/>
-          <p:nvPr/>
-        </p:nvSpPr>
-        <p:spPr>
-          <a:xfrm>
-            <a:off x="1585819" y="1859339"/>
-            <a:ext cx="6096000" cy="3139321"/>
-          </a:xfrm>
-          <a:prstGeom prst="rect">
-            <a:avLst/>
-          </a:prstGeom>
-          <a:noFill/>
-          <a:ln>
-            <a:noFill/>
-          </a:ln>
-        </p:spPr>
-        <p:txBody>
-          <a:bodyPr spcFirstLastPara="1" wrap="square" lIns="91425" tIns="45700" rIns="91425" bIns="45700" anchor="t" anchorCtr="0">
-            <a:spAutoFit/>
-          </a:bodyPr>
-          <a:lstStyle/>
-          <a:p>
-            <a:pPr marL="285750" marR="0" lvl="0" indent="-285750" algn="l" rtl="0">
-              <a:spcBef>
-                <a:spcPts val="0"/>
-              </a:spcBef>
-              <a:spcAft>
-                <a:spcPts val="0"/>
-              </a:spcAft>
-              <a:buClr>
-                <a:schemeClr val="dk1"/>
-              </a:buClr>
-              <a:buSzPts val="1800"/>
-              <a:buFont typeface="Arial"/>
-              <a:buChar char="•"/>
-            </a:pPr>
-            <a:r>
-              <a:rPr lang="en-US" sz="1800">
-                <a:solidFill>
-                  <a:schemeClr val="dk1"/>
-                </a:solidFill>
-                <a:latin typeface="Arial"/>
-                <a:ea typeface="Arial"/>
-                <a:cs typeface="Arial"/>
-                <a:sym typeface="Arial"/>
-              </a:rPr>
-              <a:t>Project Objective</a:t>
-            </a:r>
-            <a:endParaRPr/>
-          </a:p>
-          <a:p>
-            <a:pPr marL="285750" marR="0" lvl="0" indent="-171450" algn="l" rtl="0">
-              <a:spcBef>
-                <a:spcPts val="0"/>
-              </a:spcBef>
-              <a:spcAft>
-                <a:spcPts val="0"/>
-              </a:spcAft>
-              <a:buClr>
-                <a:schemeClr val="dk1"/>
-              </a:buClr>
-              <a:buSzPts val="1800"/>
-              <a:buFont typeface="Arial"/>
-              <a:buNone/>
-            </a:pPr>
-            <a:endParaRPr sz="1800">
-              <a:solidFill>
-                <a:schemeClr val="dk1"/>
-              </a:solidFill>
-              <a:latin typeface="Arial"/>
-              <a:ea typeface="Arial"/>
-              <a:cs typeface="Arial"/>
-              <a:sym typeface="Arial"/>
-            </a:endParaRPr>
-          </a:p>
-          <a:p>
-            <a:pPr marL="285750" marR="0" lvl="0" indent="-285750" algn="l" rtl="0">
-              <a:spcBef>
-                <a:spcPts val="0"/>
-              </a:spcBef>
-              <a:spcAft>
-                <a:spcPts val="0"/>
-              </a:spcAft>
-              <a:buClr>
-                <a:schemeClr val="dk1"/>
-              </a:buClr>
-              <a:buSzPts val="1800"/>
-              <a:buFont typeface="Arial"/>
-              <a:buChar char="•"/>
-            </a:pPr>
-            <a:r>
-              <a:rPr lang="en-US" sz="1800">
-                <a:solidFill>
-                  <a:schemeClr val="dk1"/>
-                </a:solidFill>
-                <a:latin typeface="Arial"/>
-                <a:ea typeface="Arial"/>
-                <a:cs typeface="Arial"/>
-                <a:sym typeface="Arial"/>
-              </a:rPr>
-              <a:t>Project Flow</a:t>
-            </a:r>
-            <a:endParaRPr sz="1800">
-              <a:solidFill>
-                <a:schemeClr val="dk1"/>
-              </a:solidFill>
-              <a:latin typeface="Arial"/>
-              <a:ea typeface="Arial"/>
-              <a:cs typeface="Arial"/>
-              <a:sym typeface="Arial"/>
-            </a:endParaRPr>
-          </a:p>
-          <a:p>
-            <a:pPr marL="457200" marR="0" lvl="0" indent="0" algn="l" rtl="0">
-              <a:spcBef>
-                <a:spcPts val="0"/>
-              </a:spcBef>
-              <a:spcAft>
-                <a:spcPts val="0"/>
-              </a:spcAft>
-              <a:buNone/>
-            </a:pPr>
-            <a:endParaRPr sz="1800">
-              <a:solidFill>
-                <a:schemeClr val="dk1"/>
-              </a:solidFill>
-            </a:endParaRPr>
-          </a:p>
-          <a:p>
-            <a:pPr marL="285750" marR="0" lvl="0" indent="-285750" algn="l" rtl="0">
-              <a:spcBef>
-                <a:spcPts val="0"/>
-              </a:spcBef>
-              <a:spcAft>
-                <a:spcPts val="0"/>
-              </a:spcAft>
-              <a:buClr>
-                <a:schemeClr val="dk1"/>
-              </a:buClr>
-              <a:buSzPts val="1800"/>
-              <a:buChar char="•"/>
-            </a:pPr>
-            <a:r>
-              <a:rPr lang="en-US" sz="1800">
-                <a:solidFill>
-                  <a:schemeClr val="dk1"/>
-                </a:solidFill>
-              </a:rPr>
-              <a:t>Dataset Overview</a:t>
-            </a:r>
-            <a:endParaRPr sz="1800">
-              <a:solidFill>
-                <a:schemeClr val="dk1"/>
-              </a:solidFill>
-            </a:endParaRPr>
-          </a:p>
-          <a:p>
-            <a:pPr marL="285750" marR="0" lvl="0" indent="-171450" algn="l" rtl="0">
-              <a:spcBef>
-                <a:spcPts val="0"/>
-              </a:spcBef>
-              <a:spcAft>
-                <a:spcPts val="0"/>
-              </a:spcAft>
-              <a:buClr>
-                <a:schemeClr val="dk1"/>
-              </a:buClr>
-              <a:buSzPts val="1800"/>
-              <a:buFont typeface="Arial"/>
-              <a:buNone/>
-            </a:pPr>
-            <a:endParaRPr sz="1800">
-              <a:solidFill>
-                <a:schemeClr val="dk1"/>
-              </a:solidFill>
-              <a:latin typeface="Arial"/>
-              <a:ea typeface="Arial"/>
-              <a:cs typeface="Arial"/>
-              <a:sym typeface="Arial"/>
-            </a:endParaRPr>
-          </a:p>
-          <a:p>
-            <a:pPr marL="285750" marR="0" lvl="0" indent="-285750" algn="l" rtl="0">
-              <a:spcBef>
-                <a:spcPts val="0"/>
-              </a:spcBef>
-              <a:spcAft>
-                <a:spcPts val="0"/>
-              </a:spcAft>
-              <a:buClr>
-                <a:schemeClr val="dk1"/>
-              </a:buClr>
-              <a:buSzPts val="1800"/>
-              <a:buFont typeface="Arial"/>
-              <a:buChar char="•"/>
-            </a:pPr>
-            <a:r>
-              <a:rPr lang="en-US" sz="1800">
-                <a:solidFill>
-                  <a:schemeClr val="dk1"/>
-                </a:solidFill>
-                <a:latin typeface="Arial"/>
-                <a:ea typeface="Arial"/>
-                <a:cs typeface="Arial"/>
-                <a:sym typeface="Arial"/>
-              </a:rPr>
-              <a:t>Project steps and screenshots</a:t>
-            </a:r>
-            <a:endParaRPr/>
-          </a:p>
-          <a:p>
-            <a:pPr marL="285750" marR="0" lvl="0" indent="-171450" algn="l" rtl="0">
-              <a:spcBef>
-                <a:spcPts val="0"/>
-              </a:spcBef>
-              <a:spcAft>
-                <a:spcPts val="0"/>
-              </a:spcAft>
-              <a:buClr>
-                <a:schemeClr val="dk1"/>
-              </a:buClr>
-              <a:buSzPts val="1800"/>
-              <a:buFont typeface="Arial"/>
-              <a:buNone/>
-            </a:pPr>
-            <a:endParaRPr sz="1800">
-              <a:solidFill>
-                <a:schemeClr val="dk1"/>
-              </a:solidFill>
-              <a:latin typeface="Arial"/>
-              <a:ea typeface="Arial"/>
-              <a:cs typeface="Arial"/>
-              <a:sym typeface="Arial"/>
-            </a:endParaRPr>
-          </a:p>
-          <a:p>
-            <a:pPr marL="285750" marR="0" lvl="0" indent="-285750" algn="l" rtl="0">
-              <a:spcBef>
-                <a:spcPts val="0"/>
-              </a:spcBef>
-              <a:spcAft>
-                <a:spcPts val="0"/>
-              </a:spcAft>
-              <a:buClr>
-                <a:schemeClr val="dk1"/>
-              </a:buClr>
-              <a:buSzPts val="1800"/>
-              <a:buFont typeface="Arial"/>
-              <a:buChar char="•"/>
-            </a:pPr>
-            <a:r>
-              <a:rPr lang="en-US" sz="1800">
-                <a:solidFill>
-                  <a:schemeClr val="dk1"/>
-                </a:solidFill>
-                <a:latin typeface="Arial"/>
-                <a:ea typeface="Arial"/>
-                <a:cs typeface="Arial"/>
-                <a:sym typeface="Arial"/>
-              </a:rPr>
-              <a:t>Business Insights and Recommendations</a:t>
-            </a:r>
-            <a:endParaRPr/>
-          </a:p>
-          <a:p>
-            <a:pPr marL="285750" marR="0" lvl="0" indent="-171450" algn="l" rtl="0">
-              <a:spcBef>
-                <a:spcPts val="0"/>
-              </a:spcBef>
-              <a:spcAft>
-                <a:spcPts val="0"/>
-              </a:spcAft>
-              <a:buClr>
-                <a:schemeClr val="dk1"/>
-              </a:buClr>
-              <a:buSzPts val="1800"/>
-              <a:buFont typeface="Arial"/>
-              <a:buNone/>
-            </a:pPr>
-            <a:endParaRPr sz="1800">
-              <a:solidFill>
-                <a:schemeClr val="dk1"/>
-              </a:solidFill>
-              <a:latin typeface="Arial"/>
-              <a:ea typeface="Arial"/>
-              <a:cs typeface="Arial"/>
-              <a:sym typeface="Arial"/>
-            </a:endParaRPr>
-          </a:p>
-          <a:p>
-            <a:pPr marL="285750" marR="0" lvl="0" indent="-285750" algn="l" rtl="0">
-              <a:spcBef>
-                <a:spcPts val="0"/>
-              </a:spcBef>
-              <a:spcAft>
-                <a:spcPts val="0"/>
-              </a:spcAft>
-              <a:buClr>
-                <a:schemeClr val="dk1"/>
-              </a:buClr>
-              <a:buSzPts val="1800"/>
-              <a:buFont typeface="Arial"/>
-              <a:buChar char="•"/>
-            </a:pPr>
-            <a:r>
-              <a:rPr lang="en-US" sz="1800">
-                <a:solidFill>
-                  <a:schemeClr val="dk1"/>
-                </a:solidFill>
-                <a:latin typeface="Arial"/>
-                <a:ea typeface="Arial"/>
-                <a:cs typeface="Arial"/>
-                <a:sym typeface="Arial"/>
-              </a:rPr>
-              <a:t>Conclusion</a:t>
-            </a:r>
-            <a:endParaRPr/>
           </a:p>
         </p:txBody>
       </p:sp>
@@ -17217,7 +17296,7 @@
         <p:spPr>
           <a:xfrm>
             <a:off x="1585827" y="1859350"/>
-            <a:ext cx="8031000" cy="3139200"/>
+            <a:ext cx="8031000" cy="3831778"/>
           </a:xfrm>
           <a:prstGeom prst="rect">
             <a:avLst/>
@@ -17233,24 +17312,19 @@
           </a:bodyPr>
           <a:lstStyle/>
           <a:p>
-            <a:pPr marL="457200" lvl="0" indent="-342900" algn="l" rtl="0">
+            <a:pPr marL="457200" indent="-342900">
               <a:lnSpc>
                 <a:spcPct val="150000"/>
               </a:lnSpc>
-              <a:spcBef>
-                <a:spcPts val="0"/>
-              </a:spcBef>
-              <a:spcAft>
-                <a:spcPts val="0"/>
-              </a:spcAft>
               <a:buClr>
                 <a:schemeClr val="dk1"/>
               </a:buClr>
               <a:buSzPts val="1800"/>
+              <a:buFont typeface="Arial"/>
               <a:buChar char="•"/>
             </a:pPr>
             <a:r>
-              <a:rPr lang="en-US" sz="1800">
+              <a:rPr lang="en-US" sz="1800" dirty="0">
                 <a:solidFill>
                   <a:schemeClr val="dk1"/>
                 </a:solidFill>
@@ -17258,12 +17332,28 @@
               <a:t>Build an interactive Power BI dashboard named </a:t>
             </a:r>
             <a:r>
-              <a:rPr lang="en-US" sz="1800" b="1">
+              <a:rPr lang="en-US" sz="1800" b="1" dirty="0" smtClean="0">
                 <a:solidFill>
                   <a:schemeClr val="dk1"/>
                 </a:solidFill>
+                <a:latin typeface="Calibri"/>
+                <a:ea typeface="Calibri"/>
+                <a:cs typeface="Calibri"/>
+                <a:sym typeface="Calibri"/>
               </a:rPr>
-              <a:t>EVision Analytics</a:t>
+              <a:t>Global EV </a:t>
+            </a:r>
+            <a:r>
+              <a:rPr lang="en-US" sz="1800" b="1" dirty="0" smtClean="0">
+                <a:solidFill>
+                  <a:schemeClr val="dk1"/>
+                </a:solidFill>
+                <a:latin typeface="Calibri"/>
+                <a:ea typeface="Calibri"/>
+                <a:cs typeface="Calibri"/>
+                <a:sym typeface="Calibri"/>
+              </a:rPr>
+              <a:t>Sales</a:t>
             </a:r>
             <a:endParaRPr sz="1800" b="1">
               <a:solidFill>
@@ -17289,7 +17379,7 @@
               <a:buChar char="•"/>
             </a:pPr>
             <a:r>
-              <a:rPr lang="en-US" sz="1800">
+              <a:rPr lang="en-US" sz="1800" dirty="0">
                 <a:solidFill>
                   <a:schemeClr val="dk1"/>
                 </a:solidFill>
@@ -17320,7 +17410,7 @@
               <a:buChar char="•"/>
             </a:pPr>
             <a:r>
-              <a:rPr lang="en-US" sz="1800">
+              <a:rPr lang="en-US" sz="1800" dirty="0">
                 <a:solidFill>
                   <a:schemeClr val="dk1"/>
                 </a:solidFill>
@@ -17351,12 +17441,28 @@
               <a:buChar char="•"/>
             </a:pPr>
             <a:r>
-              <a:rPr lang="en-US" sz="1800">
+              <a:rPr lang="en-US" sz="1800" dirty="0">
                 <a:solidFill>
                   <a:schemeClr val="dk1"/>
                 </a:solidFill>
               </a:rPr>
-              <a:t>Compare powertrain technologies (BEV, PHEV, FCEV)</a:t>
+              <a:t>Compare </a:t>
+            </a:r>
+            <a:r>
+              <a:rPr lang="en-US" sz="1800" dirty="0" err="1">
+                <a:solidFill>
+                  <a:schemeClr val="dk1"/>
+                </a:solidFill>
+              </a:rPr>
+              <a:t>powertrain</a:t>
+            </a:r>
+            <a:r>
+              <a:rPr lang="en-US" sz="1800" dirty="0">
+                <a:solidFill>
+                  <a:schemeClr val="dk1"/>
+                </a:solidFill>
+              </a:rPr>
+              <a:t> technologies (BEV, PHEV, FCEV)</a:t>
             </a:r>
             <a:endParaRPr sz="1800">
               <a:solidFill>
@@ -17382,7 +17488,7 @@
               <a:buChar char="•"/>
             </a:pPr>
             <a:r>
-              <a:rPr lang="en-US" sz="1800">
+              <a:rPr lang="en-US" sz="1800" dirty="0">
                 <a:solidFill>
                   <a:schemeClr val="dk1"/>
                 </a:solidFill>
@@ -17413,7 +17519,7 @@
               <a:buChar char="•"/>
             </a:pPr>
             <a:r>
-              <a:rPr lang="en-US" sz="1800">
+              <a:rPr lang="en-US" sz="1800" dirty="0">
                 <a:solidFill>
                   <a:schemeClr val="dk1"/>
                 </a:solidFill>
@@ -17444,7 +17550,7 @@
               <a:buChar char="•"/>
             </a:pPr>
             <a:r>
-              <a:rPr lang="en-US" sz="1800">
+              <a:rPr lang="en-US" sz="1800" dirty="0">
                 <a:solidFill>
                   <a:schemeClr val="dk1"/>
                 </a:solidFill>
@@ -17475,7 +17581,7 @@
               <a:buChar char="•"/>
             </a:pPr>
             <a:r>
-              <a:rPr lang="en-US" sz="1800">
+              <a:rPr lang="en-US" sz="1800" dirty="0">
                 <a:solidFill>
                   <a:schemeClr val="dk1"/>
                 </a:solidFill>
@@ -17506,7 +17612,7 @@
               <a:buChar char="•"/>
             </a:pPr>
             <a:r>
-              <a:rPr lang="en-US" sz="1800">
+              <a:rPr lang="en-US" sz="1800" dirty="0">
                 <a:solidFill>
                   <a:schemeClr val="dk1"/>
                 </a:solidFill>
